--- a/docs/public/downloads/ppt/03_supplier_onboarding_zh.pptx
+++ b/docs/public/downloads/ppt/03_supplier_onboarding_zh.pptx
@@ -5,27 +5,27 @@
     <p:sldMasterId id="2147483648" r:id="rId1"/>
   </p:sldMasterIdLst>
   <p:sldIdLst>
-    <p:sldId id="256" r:id="rId7"/>
-    <p:sldId id="257" r:id="rId8"/>
-    <p:sldId id="258" r:id="rId9"/>
-    <p:sldId id="259" r:id="rId10"/>
-    <p:sldId id="260" r:id="rId11"/>
-    <p:sldId id="261" r:id="rId12"/>
-    <p:sldId id="262" r:id="rId13"/>
-    <p:sldId id="263" r:id="rId14"/>
-    <p:sldId id="264" r:id="rId15"/>
-    <p:sldId id="265" r:id="rId16"/>
-    <p:sldId id="266" r:id="rId17"/>
-    <p:sldId id="267" r:id="rId18"/>
-    <p:sldId id="268" r:id="rId19"/>
-    <p:sldId id="269" r:id="rId20"/>
-    <p:sldId id="270" r:id="rId21"/>
-    <p:sldId id="271" r:id="rId22"/>
-    <p:sldId id="272" r:id="rId23"/>
-    <p:sldId id="273" r:id="rId24"/>
-    <p:sldId id="274" r:id="rId25"/>
+    <p:sldId id="256" r:id="rId2"/>
+    <p:sldId id="257" r:id="rId3"/>
+    <p:sldId id="258" r:id="rId4"/>
+    <p:sldId id="259" r:id="rId5"/>
+    <p:sldId id="260" r:id="rId6"/>
+    <p:sldId id="261" r:id="rId7"/>
+    <p:sldId id="262" r:id="rId8"/>
+    <p:sldId id="263" r:id="rId9"/>
+    <p:sldId id="264" r:id="rId10"/>
+    <p:sldId id="265" r:id="rId11"/>
+    <p:sldId id="266" r:id="rId12"/>
+    <p:sldId id="267" r:id="rId13"/>
+    <p:sldId id="268" r:id="rId14"/>
+    <p:sldId id="269" r:id="rId15"/>
+    <p:sldId id="270" r:id="rId16"/>
+    <p:sldId id="271" r:id="rId17"/>
+    <p:sldId id="272" r:id="rId18"/>
+    <p:sldId id="273" r:id="rId19"/>
+    <p:sldId id="274" r:id="rId20"/>
   </p:sldIdLst>
-  <p:sldSz cx="12188952" cy="6858000" type="screen4x3"/>
+  <p:sldSz cx="12188825" cy="6858000"/>
   <p:notesSz cx="6858000" cy="9144000"/>
   <p:defaultTextStyle>
     <a:defPPr>
@@ -122,7 +122,52 @@
       </a:defRPr>
     </a:lvl9pPr>
   </p:defaultTextStyle>
+  <p:extLst>
+    <p:ext uri="{EFAFB233-063F-42B5-8137-9DF3F51BA10A}">
+      <p15:sldGuideLst xmlns:p15="http://schemas.microsoft.com/office/powerpoint/2012/main">
+        <p15:guide id="1" orient="horz" pos="2160">
+          <p15:clr>
+            <a:srgbClr val="A4A3A4"/>
+          </p15:clr>
+        </p15:guide>
+        <p15:guide id="2" pos="2880">
+          <p15:clr>
+            <a:srgbClr val="A4A3A4"/>
+          </p15:clr>
+        </p15:guide>
+      </p15:sldGuideLst>
+    </p:ext>
+  </p:extLst>
 </p:presentation>
+</file>
+
+<file path=ppt/changesInfos/changesInfo1.xml><?xml version="1.0" encoding="utf-8"?>
+<pc:chgInfo xmlns:a="http://schemas.openxmlformats.org/drawingml/2006/main" xmlns:r="http://schemas.openxmlformats.org/officeDocument/2006/relationships" xmlns:ac="http://schemas.microsoft.com/office/drawing/2013/main/command" xmlns:pc="http://schemas.microsoft.com/office/powerpoint/2013/main/command">
+  <pc:docChgLst>
+    <pc:chgData name="Jack Zhong" userId="103a72fdc47caf9a" providerId="LiveId" clId="{241CEE3F-E019-4D18-BE04-9ADE5BA626CC}"/>
+    <pc:docChg chg="undo custSel modSld">
+      <pc:chgData name="Jack Zhong" userId="103a72fdc47caf9a" providerId="LiveId" clId="{241CEE3F-E019-4D18-BE04-9ADE5BA626CC}" dt="2026-04-06T09:14:37.743" v="13" actId="20577"/>
+      <pc:docMkLst>
+        <pc:docMk/>
+      </pc:docMkLst>
+      <pc:sldChg chg="modSp mod">
+        <pc:chgData name="Jack Zhong" userId="103a72fdc47caf9a" providerId="LiveId" clId="{241CEE3F-E019-4D18-BE04-9ADE5BA626CC}" dt="2026-04-06T09:14:37.743" v="13" actId="20577"/>
+        <pc:sldMkLst>
+          <pc:docMk/>
+          <pc:sldMk cId="0" sldId="268"/>
+        </pc:sldMkLst>
+        <pc:spChg chg="mod">
+          <ac:chgData name="Jack Zhong" userId="103a72fdc47caf9a" providerId="LiveId" clId="{241CEE3F-E019-4D18-BE04-9ADE5BA626CC}" dt="2026-04-06T09:14:37.743" v="13" actId="20577"/>
+          <ac:spMkLst>
+            <pc:docMk/>
+            <pc:sldMk cId="0" sldId="268"/>
+            <ac:spMk id="4" creationId="{00000000-0000-0000-0000-000000000000}"/>
+          </ac:spMkLst>
+        </pc:spChg>
+      </pc:sldChg>
+    </pc:docChg>
+  </pc:docChgLst>
+</pc:chgInfo>
 </file>
 
 <file path=ppt/slideLayouts/slideLayout1.xml><?xml version="1.0" encoding="utf-8"?>
@@ -163,10 +208,9 @@
           <a:lstStyle/>
           <a:p>
             <a:r>
-              <a:rPr lang="en-US" smtClean="0"/>
+              <a:rPr lang="en-US"/>
               <a:t>Click to edit Master title style</a:t>
             </a:r>
-            <a:endParaRPr lang="en-US"/>
           </a:p>
         </p:txBody>
       </p:sp>
@@ -282,10 +326,9 @@
           </a:lstStyle>
           <a:p>
             <a:r>
-              <a:rPr lang="en-US" smtClean="0"/>
+              <a:rPr lang="en-US"/>
               <a:t>Click to edit Master subtitle style</a:t>
             </a:r>
-            <a:endParaRPr lang="en-US"/>
           </a:p>
         </p:txBody>
       </p:sp>
@@ -306,7 +349,7 @@
           <a:p>
             <a:fld id="{5BCAD085-E8A6-8845-BD4E-CB4CCA059FC4}" type="datetimeFigureOut">
               <a:rPr lang="en-US" smtClean="0"/>
-              <a:t>1/27/13</a:t>
+              <a:t>4/6/2026</a:t>
             </a:fld>
             <a:endParaRPr lang="en-US"/>
           </a:p>
@@ -400,10 +443,9 @@
           <a:lstStyle/>
           <a:p>
             <a:r>
-              <a:rPr lang="en-US" smtClean="0"/>
+              <a:rPr lang="en-US"/>
               <a:t>Click to edit Master title style</a:t>
             </a:r>
-            <a:endParaRPr lang="en-US"/>
           </a:p>
         </p:txBody>
       </p:sp>
@@ -424,38 +466,37 @@
           <a:p>
             <a:pPr lvl="0"/>
             <a:r>
-              <a:rPr lang="en-US" smtClean="0"/>
+              <a:rPr lang="en-US"/>
               <a:t>Click to edit Master text styles</a:t>
             </a:r>
           </a:p>
           <a:p>
             <a:pPr lvl="1"/>
             <a:r>
-              <a:rPr lang="en-US" smtClean="0"/>
+              <a:rPr lang="en-US"/>
               <a:t>Second level</a:t>
             </a:r>
           </a:p>
           <a:p>
             <a:pPr lvl="2"/>
             <a:r>
-              <a:rPr lang="en-US" smtClean="0"/>
+              <a:rPr lang="en-US"/>
               <a:t>Third level</a:t>
             </a:r>
           </a:p>
           <a:p>
             <a:pPr lvl="3"/>
             <a:r>
-              <a:rPr lang="en-US" smtClean="0"/>
+              <a:rPr lang="en-US"/>
               <a:t>Fourth level</a:t>
             </a:r>
           </a:p>
           <a:p>
             <a:pPr lvl="4"/>
             <a:r>
-              <a:rPr lang="en-US" smtClean="0"/>
+              <a:rPr lang="en-US"/>
               <a:t>Fifth level</a:t>
             </a:r>
-            <a:endParaRPr lang="en-US"/>
           </a:p>
         </p:txBody>
       </p:sp>
@@ -476,7 +517,7 @@
           <a:p>
             <a:fld id="{5BCAD085-E8A6-8845-BD4E-CB4CCA059FC4}" type="datetimeFigureOut">
               <a:rPr lang="en-US" smtClean="0"/>
-              <a:t>1/27/13</a:t>
+              <a:t>4/6/2026</a:t>
             </a:fld>
             <a:endParaRPr lang="en-US"/>
           </a:p>
@@ -575,10 +616,9 @@
           <a:lstStyle/>
           <a:p>
             <a:r>
-              <a:rPr lang="en-US" smtClean="0"/>
+              <a:rPr lang="en-US"/>
               <a:t>Click to edit Master title style</a:t>
             </a:r>
-            <a:endParaRPr lang="en-US"/>
           </a:p>
         </p:txBody>
       </p:sp>
@@ -604,38 +644,37 @@
           <a:p>
             <a:pPr lvl="0"/>
             <a:r>
-              <a:rPr lang="en-US" smtClean="0"/>
+              <a:rPr lang="en-US"/>
               <a:t>Click to edit Master text styles</a:t>
             </a:r>
           </a:p>
           <a:p>
             <a:pPr lvl="1"/>
             <a:r>
-              <a:rPr lang="en-US" smtClean="0"/>
+              <a:rPr lang="en-US"/>
               <a:t>Second level</a:t>
             </a:r>
           </a:p>
           <a:p>
             <a:pPr lvl="2"/>
             <a:r>
-              <a:rPr lang="en-US" smtClean="0"/>
+              <a:rPr lang="en-US"/>
               <a:t>Third level</a:t>
             </a:r>
           </a:p>
           <a:p>
             <a:pPr lvl="3"/>
             <a:r>
-              <a:rPr lang="en-US" smtClean="0"/>
+              <a:rPr lang="en-US"/>
               <a:t>Fourth level</a:t>
             </a:r>
           </a:p>
           <a:p>
             <a:pPr lvl="4"/>
             <a:r>
-              <a:rPr lang="en-US" smtClean="0"/>
+              <a:rPr lang="en-US"/>
               <a:t>Fifth level</a:t>
             </a:r>
-            <a:endParaRPr lang="en-US"/>
           </a:p>
         </p:txBody>
       </p:sp>
@@ -656,7 +695,7 @@
           <a:p>
             <a:fld id="{5BCAD085-E8A6-8845-BD4E-CB4CCA059FC4}" type="datetimeFigureOut">
               <a:rPr lang="en-US" smtClean="0"/>
-              <a:t>1/27/13</a:t>
+              <a:t>4/6/2026</a:t>
             </a:fld>
             <a:endParaRPr lang="en-US"/>
           </a:p>
@@ -750,10 +789,9 @@
           <a:lstStyle/>
           <a:p>
             <a:r>
-              <a:rPr lang="en-US" smtClean="0"/>
+              <a:rPr lang="en-US"/>
               <a:t>Click to edit Master title style</a:t>
             </a:r>
-            <a:endParaRPr lang="en-US"/>
           </a:p>
         </p:txBody>
       </p:sp>
@@ -774,38 +812,37 @@
           <a:p>
             <a:pPr lvl="0"/>
             <a:r>
-              <a:rPr lang="en-US" smtClean="0"/>
+              <a:rPr lang="en-US"/>
               <a:t>Click to edit Master text styles</a:t>
             </a:r>
           </a:p>
           <a:p>
             <a:pPr lvl="1"/>
             <a:r>
-              <a:rPr lang="en-US" smtClean="0"/>
+              <a:rPr lang="en-US"/>
               <a:t>Second level</a:t>
             </a:r>
           </a:p>
           <a:p>
             <a:pPr lvl="2"/>
             <a:r>
-              <a:rPr lang="en-US" smtClean="0"/>
+              <a:rPr lang="en-US"/>
               <a:t>Third level</a:t>
             </a:r>
           </a:p>
           <a:p>
             <a:pPr lvl="3"/>
             <a:r>
-              <a:rPr lang="en-US" smtClean="0"/>
+              <a:rPr lang="en-US"/>
               <a:t>Fourth level</a:t>
             </a:r>
           </a:p>
           <a:p>
             <a:pPr lvl="4"/>
             <a:r>
-              <a:rPr lang="en-US" smtClean="0"/>
+              <a:rPr lang="en-US"/>
               <a:t>Fifth level</a:t>
             </a:r>
-            <a:endParaRPr lang="en-US"/>
           </a:p>
         </p:txBody>
       </p:sp>
@@ -826,7 +863,7 @@
           <a:p>
             <a:fld id="{5BCAD085-E8A6-8845-BD4E-CB4CCA059FC4}" type="datetimeFigureOut">
               <a:rPr lang="en-US" smtClean="0"/>
-              <a:t>1/27/13</a:t>
+              <a:t>4/6/2026</a:t>
             </a:fld>
             <a:endParaRPr lang="en-US"/>
           </a:p>
@@ -929,10 +966,9 @@
           </a:lstStyle>
           <a:p>
             <a:r>
-              <a:rPr lang="en-US" smtClean="0"/>
+              <a:rPr lang="en-US"/>
               <a:t>Click to edit Master title style</a:t>
             </a:r>
-            <a:endParaRPr lang="en-US"/>
           </a:p>
         </p:txBody>
       </p:sp>
@@ -1049,7 +1085,7 @@
           <a:p>
             <a:pPr lvl="0"/>
             <a:r>
-              <a:rPr lang="en-US" smtClean="0"/>
+              <a:rPr lang="en-US"/>
               <a:t>Click to edit Master text styles</a:t>
             </a:r>
           </a:p>
@@ -1072,7 +1108,7 @@
           <a:p>
             <a:fld id="{5BCAD085-E8A6-8845-BD4E-CB4CCA059FC4}" type="datetimeFigureOut">
               <a:rPr lang="en-US" smtClean="0"/>
-              <a:t>1/27/13</a:t>
+              <a:t>4/6/2026</a:t>
             </a:fld>
             <a:endParaRPr lang="en-US"/>
           </a:p>
@@ -1166,10 +1202,9 @@
           <a:lstStyle/>
           <a:p>
             <a:r>
-              <a:rPr lang="en-US" smtClean="0"/>
+              <a:rPr lang="en-US"/>
               <a:t>Click to edit Master title style</a:t>
             </a:r>
-            <a:endParaRPr lang="en-US"/>
           </a:p>
         </p:txBody>
       </p:sp>
@@ -1223,38 +1258,37 @@
           <a:p>
             <a:pPr lvl="0"/>
             <a:r>
-              <a:rPr lang="en-US" smtClean="0"/>
+              <a:rPr lang="en-US"/>
               <a:t>Click to edit Master text styles</a:t>
             </a:r>
           </a:p>
           <a:p>
             <a:pPr lvl="1"/>
             <a:r>
-              <a:rPr lang="en-US" smtClean="0"/>
+              <a:rPr lang="en-US"/>
               <a:t>Second level</a:t>
             </a:r>
           </a:p>
           <a:p>
             <a:pPr lvl="2"/>
             <a:r>
-              <a:rPr lang="en-US" smtClean="0"/>
+              <a:rPr lang="en-US"/>
               <a:t>Third level</a:t>
             </a:r>
           </a:p>
           <a:p>
             <a:pPr lvl="3"/>
             <a:r>
-              <a:rPr lang="en-US" smtClean="0"/>
+              <a:rPr lang="en-US"/>
               <a:t>Fourth level</a:t>
             </a:r>
           </a:p>
           <a:p>
             <a:pPr lvl="4"/>
             <a:r>
-              <a:rPr lang="en-US" smtClean="0"/>
+              <a:rPr lang="en-US"/>
               <a:t>Fifth level</a:t>
             </a:r>
-            <a:endParaRPr lang="en-US"/>
           </a:p>
         </p:txBody>
       </p:sp>
@@ -1308,38 +1342,37 @@
           <a:p>
             <a:pPr lvl="0"/>
             <a:r>
-              <a:rPr lang="en-US" smtClean="0"/>
+              <a:rPr lang="en-US"/>
               <a:t>Click to edit Master text styles</a:t>
             </a:r>
           </a:p>
           <a:p>
             <a:pPr lvl="1"/>
             <a:r>
-              <a:rPr lang="en-US" smtClean="0"/>
+              <a:rPr lang="en-US"/>
               <a:t>Second level</a:t>
             </a:r>
           </a:p>
           <a:p>
             <a:pPr lvl="2"/>
             <a:r>
-              <a:rPr lang="en-US" smtClean="0"/>
+              <a:rPr lang="en-US"/>
               <a:t>Third level</a:t>
             </a:r>
           </a:p>
           <a:p>
             <a:pPr lvl="3"/>
             <a:r>
-              <a:rPr lang="en-US" smtClean="0"/>
+              <a:rPr lang="en-US"/>
               <a:t>Fourth level</a:t>
             </a:r>
           </a:p>
           <a:p>
             <a:pPr lvl="4"/>
             <a:r>
-              <a:rPr lang="en-US" smtClean="0"/>
+              <a:rPr lang="en-US"/>
               <a:t>Fifth level</a:t>
             </a:r>
-            <a:endParaRPr lang="en-US"/>
           </a:p>
         </p:txBody>
       </p:sp>
@@ -1360,7 +1393,7 @@
           <a:p>
             <a:fld id="{5BCAD085-E8A6-8845-BD4E-CB4CCA059FC4}" type="datetimeFigureOut">
               <a:rPr lang="en-US" smtClean="0"/>
-              <a:t>1/27/13</a:t>
+              <a:t>4/6/2026</a:t>
             </a:fld>
             <a:endParaRPr lang="en-US"/>
           </a:p>
@@ -1458,10 +1491,9 @@
           </a:lstStyle>
           <a:p>
             <a:r>
-              <a:rPr lang="en-US" smtClean="0"/>
+              <a:rPr lang="en-US"/>
               <a:t>Click to edit Master title style</a:t>
             </a:r>
-            <a:endParaRPr lang="en-US"/>
           </a:p>
         </p:txBody>
       </p:sp>
@@ -1524,7 +1556,7 @@
           <a:p>
             <a:pPr lvl="0"/>
             <a:r>
-              <a:rPr lang="en-US" smtClean="0"/>
+              <a:rPr lang="en-US"/>
               <a:t>Click to edit Master text styles</a:t>
             </a:r>
           </a:p>
@@ -1580,38 +1612,37 @@
           <a:p>
             <a:pPr lvl="0"/>
             <a:r>
-              <a:rPr lang="en-US" smtClean="0"/>
+              <a:rPr lang="en-US"/>
               <a:t>Click to edit Master text styles</a:t>
             </a:r>
           </a:p>
           <a:p>
             <a:pPr lvl="1"/>
             <a:r>
-              <a:rPr lang="en-US" smtClean="0"/>
+              <a:rPr lang="en-US"/>
               <a:t>Second level</a:t>
             </a:r>
           </a:p>
           <a:p>
             <a:pPr lvl="2"/>
             <a:r>
-              <a:rPr lang="en-US" smtClean="0"/>
+              <a:rPr lang="en-US"/>
               <a:t>Third level</a:t>
             </a:r>
           </a:p>
           <a:p>
             <a:pPr lvl="3"/>
             <a:r>
-              <a:rPr lang="en-US" smtClean="0"/>
+              <a:rPr lang="en-US"/>
               <a:t>Fourth level</a:t>
             </a:r>
           </a:p>
           <a:p>
             <a:pPr lvl="4"/>
             <a:r>
-              <a:rPr lang="en-US" smtClean="0"/>
+              <a:rPr lang="en-US"/>
               <a:t>Fifth level</a:t>
             </a:r>
-            <a:endParaRPr lang="en-US"/>
           </a:p>
         </p:txBody>
       </p:sp>
@@ -1674,7 +1705,7 @@
           <a:p>
             <a:pPr lvl="0"/>
             <a:r>
-              <a:rPr lang="en-US" smtClean="0"/>
+              <a:rPr lang="en-US"/>
               <a:t>Click to edit Master text styles</a:t>
             </a:r>
           </a:p>
@@ -1730,38 +1761,37 @@
           <a:p>
             <a:pPr lvl="0"/>
             <a:r>
-              <a:rPr lang="en-US" smtClean="0"/>
+              <a:rPr lang="en-US"/>
               <a:t>Click to edit Master text styles</a:t>
             </a:r>
           </a:p>
           <a:p>
             <a:pPr lvl="1"/>
             <a:r>
-              <a:rPr lang="en-US" smtClean="0"/>
+              <a:rPr lang="en-US"/>
               <a:t>Second level</a:t>
             </a:r>
           </a:p>
           <a:p>
             <a:pPr lvl="2"/>
             <a:r>
-              <a:rPr lang="en-US" smtClean="0"/>
+              <a:rPr lang="en-US"/>
               <a:t>Third level</a:t>
             </a:r>
           </a:p>
           <a:p>
             <a:pPr lvl="3"/>
             <a:r>
-              <a:rPr lang="en-US" smtClean="0"/>
+              <a:rPr lang="en-US"/>
               <a:t>Fourth level</a:t>
             </a:r>
           </a:p>
           <a:p>
             <a:pPr lvl="4"/>
             <a:r>
-              <a:rPr lang="en-US" smtClean="0"/>
+              <a:rPr lang="en-US"/>
               <a:t>Fifth level</a:t>
             </a:r>
-            <a:endParaRPr lang="en-US"/>
           </a:p>
         </p:txBody>
       </p:sp>
@@ -1782,7 +1812,7 @@
           <a:p>
             <a:fld id="{5BCAD085-E8A6-8845-BD4E-CB4CCA059FC4}" type="datetimeFigureOut">
               <a:rPr lang="en-US" smtClean="0"/>
-              <a:t>1/27/13</a:t>
+              <a:t>4/6/2026</a:t>
             </a:fld>
             <a:endParaRPr lang="en-US"/>
           </a:p>
@@ -1876,10 +1906,9 @@
           <a:lstStyle/>
           <a:p>
             <a:r>
-              <a:rPr lang="en-US" smtClean="0"/>
+              <a:rPr lang="en-US"/>
               <a:t>Click to edit Master title style</a:t>
             </a:r>
-            <a:endParaRPr lang="en-US"/>
           </a:p>
         </p:txBody>
       </p:sp>
@@ -1900,7 +1929,7 @@
           <a:p>
             <a:fld id="{5BCAD085-E8A6-8845-BD4E-CB4CCA059FC4}" type="datetimeFigureOut">
               <a:rPr lang="en-US" smtClean="0"/>
-              <a:t>1/27/13</a:t>
+              <a:t>4/6/2026</a:t>
             </a:fld>
             <a:endParaRPr lang="en-US"/>
           </a:p>
@@ -1995,7 +2024,7 @@
           <a:p>
             <a:fld id="{5BCAD085-E8A6-8845-BD4E-CB4CCA059FC4}" type="datetimeFigureOut">
               <a:rPr lang="en-US" smtClean="0"/>
-              <a:t>1/27/13</a:t>
+              <a:t>4/6/2026</a:t>
             </a:fld>
             <a:endParaRPr lang="en-US"/>
           </a:p>
@@ -2098,10 +2127,9 @@
           </a:lstStyle>
           <a:p>
             <a:r>
-              <a:rPr lang="en-US" smtClean="0"/>
+              <a:rPr lang="en-US"/>
               <a:t>Click to edit Master title style</a:t>
             </a:r>
-            <a:endParaRPr lang="en-US"/>
           </a:p>
         </p:txBody>
       </p:sp>
@@ -2155,38 +2183,37 @@
           <a:p>
             <a:pPr lvl="0"/>
             <a:r>
-              <a:rPr lang="en-US" smtClean="0"/>
+              <a:rPr lang="en-US"/>
               <a:t>Click to edit Master text styles</a:t>
             </a:r>
           </a:p>
           <a:p>
             <a:pPr lvl="1"/>
             <a:r>
-              <a:rPr lang="en-US" smtClean="0"/>
+              <a:rPr lang="en-US"/>
               <a:t>Second level</a:t>
             </a:r>
           </a:p>
           <a:p>
             <a:pPr lvl="2"/>
             <a:r>
-              <a:rPr lang="en-US" smtClean="0"/>
+              <a:rPr lang="en-US"/>
               <a:t>Third level</a:t>
             </a:r>
           </a:p>
           <a:p>
             <a:pPr lvl="3"/>
             <a:r>
-              <a:rPr lang="en-US" smtClean="0"/>
+              <a:rPr lang="en-US"/>
               <a:t>Fourth level</a:t>
             </a:r>
           </a:p>
           <a:p>
             <a:pPr lvl="4"/>
             <a:r>
-              <a:rPr lang="en-US" smtClean="0"/>
+              <a:rPr lang="en-US"/>
               <a:t>Fifth level</a:t>
             </a:r>
-            <a:endParaRPr lang="en-US"/>
           </a:p>
         </p:txBody>
       </p:sp>
@@ -2249,7 +2276,7 @@
           <a:p>
             <a:pPr lvl="0"/>
             <a:r>
-              <a:rPr lang="en-US" smtClean="0"/>
+              <a:rPr lang="en-US"/>
               <a:t>Click to edit Master text styles</a:t>
             </a:r>
           </a:p>
@@ -2272,7 +2299,7 @@
           <a:p>
             <a:fld id="{5BCAD085-E8A6-8845-BD4E-CB4CCA059FC4}" type="datetimeFigureOut">
               <a:rPr lang="en-US" smtClean="0"/>
-              <a:t>1/27/13</a:t>
+              <a:t>4/6/2026</a:t>
             </a:fld>
             <a:endParaRPr lang="en-US"/>
           </a:p>
@@ -2375,10 +2402,9 @@
           </a:lstStyle>
           <a:p>
             <a:r>
-              <a:rPr lang="en-US" smtClean="0"/>
+              <a:rPr lang="en-US"/>
               <a:t>Click to edit Master title style</a:t>
             </a:r>
-            <a:endParaRPr lang="en-US"/>
           </a:p>
         </p:txBody>
       </p:sp>
@@ -2502,7 +2528,7 @@
           <a:p>
             <a:pPr lvl="0"/>
             <a:r>
-              <a:rPr lang="en-US" smtClean="0"/>
+              <a:rPr lang="en-US"/>
               <a:t>Click to edit Master text styles</a:t>
             </a:r>
           </a:p>
@@ -2525,7 +2551,7 @@
           <a:p>
             <a:fld id="{5BCAD085-E8A6-8845-BD4E-CB4CCA059FC4}" type="datetimeFigureOut">
               <a:rPr lang="en-US" smtClean="0"/>
-              <a:t>1/27/13</a:t>
+              <a:t>4/6/2026</a:t>
             </a:fld>
             <a:endParaRPr lang="en-US"/>
           </a:p>
@@ -2634,10 +2660,9 @@
           <a:lstStyle/>
           <a:p>
             <a:r>
-              <a:rPr lang="en-US" smtClean="0"/>
+              <a:rPr lang="en-US"/>
               <a:t>Click to edit Master title style</a:t>
             </a:r>
-            <a:endParaRPr lang="en-US"/>
           </a:p>
         </p:txBody>
       </p:sp>
@@ -2668,38 +2693,37 @@
           <a:p>
             <a:pPr lvl="0"/>
             <a:r>
-              <a:rPr lang="en-US" smtClean="0"/>
+              <a:rPr lang="en-US"/>
               <a:t>Click to edit Master text styles</a:t>
             </a:r>
           </a:p>
           <a:p>
             <a:pPr lvl="1"/>
             <a:r>
-              <a:rPr lang="en-US" smtClean="0"/>
+              <a:rPr lang="en-US"/>
               <a:t>Second level</a:t>
             </a:r>
           </a:p>
           <a:p>
             <a:pPr lvl="2"/>
             <a:r>
-              <a:rPr lang="en-US" smtClean="0"/>
+              <a:rPr lang="en-US"/>
               <a:t>Third level</a:t>
             </a:r>
           </a:p>
           <a:p>
             <a:pPr lvl="3"/>
             <a:r>
-              <a:rPr lang="en-US" smtClean="0"/>
+              <a:rPr lang="en-US"/>
               <a:t>Fourth level</a:t>
             </a:r>
           </a:p>
           <a:p>
             <a:pPr lvl="4"/>
             <a:r>
-              <a:rPr lang="en-US" smtClean="0"/>
+              <a:rPr lang="en-US"/>
               <a:t>Fifth level</a:t>
             </a:r>
-            <a:endParaRPr lang="en-US"/>
           </a:p>
         </p:txBody>
       </p:sp>
@@ -2738,7 +2762,7 @@
           <a:p>
             <a:fld id="{5BCAD085-E8A6-8845-BD4E-CB4CCA059FC4}" type="datetimeFigureOut">
               <a:rPr lang="en-US" smtClean="0"/>
-              <a:t>1/27/13</a:t>
+              <a:t>4/6/2026</a:t>
             </a:fld>
             <a:endParaRPr lang="en-US"/>
           </a:p>
@@ -3097,7 +3121,7 @@
 </file>
 
 <file path=ppt/slides/slide1.xml><?xml version="1.0" encoding="utf-8"?>
-<p:sld xmlns:a="http://schemas.openxmlformats.org/drawingml/2006/main" xmlns:p="http://schemas.openxmlformats.org/presentationml/2006/main" xmlns:r="http://schemas.openxmlformats.org/officeDocument/2006/relationships">
+<p:sld xmlns:a="http://schemas.openxmlformats.org/drawingml/2006/main" xmlns:r="http://schemas.openxmlformats.org/officeDocument/2006/relationships" xmlns:p="http://schemas.openxmlformats.org/presentationml/2006/main">
   <p:cSld>
     <p:spTree>
       <p:nvGrpSpPr>
@@ -3105,7 +3129,14 @@
         <p:cNvGrpSpPr/>
         <p:nvPr/>
       </p:nvGrpSpPr>
-      <p:grpSpPr/>
+      <p:grpSpPr>
+        <a:xfrm>
+          <a:off x="0" y="0"/>
+          <a:ext cx="0" cy="0"/>
+          <a:chOff x="0" y="0"/>
+          <a:chExt cx="0" cy="0"/>
+        </a:xfrm>
+      </p:grpSpPr>
       <p:sp>
         <p:nvSpPr>
           <p:cNvPr id="2" name="Rectangle 1"/>
@@ -3146,6 +3177,7 @@
           <a:lstStyle/>
           <a:p>
             <a:pPr algn="ctr"/>
+            <a:endParaRPr/>
           </a:p>
         </p:txBody>
       </p:sp>
@@ -3334,7 +3366,7 @@
 </file>
 
 <file path=ppt/slides/slide10.xml><?xml version="1.0" encoding="utf-8"?>
-<p:sld xmlns:a="http://schemas.openxmlformats.org/drawingml/2006/main" xmlns:p="http://schemas.openxmlformats.org/presentationml/2006/main" xmlns:r="http://schemas.openxmlformats.org/officeDocument/2006/relationships">
+<p:sld xmlns:a="http://schemas.openxmlformats.org/drawingml/2006/main" xmlns:r="http://schemas.openxmlformats.org/officeDocument/2006/relationships" xmlns:p="http://schemas.openxmlformats.org/presentationml/2006/main">
   <p:cSld>
     <p:bg>
       <p:bgPr>
@@ -3350,7 +3382,14 @@
         <p:cNvGrpSpPr/>
         <p:nvPr/>
       </p:nvGrpSpPr>
-      <p:grpSpPr/>
+      <p:grpSpPr>
+        <a:xfrm>
+          <a:off x="0" y="0"/>
+          <a:ext cx="0" cy="0"/>
+          <a:chOff x="0" y="0"/>
+          <a:chExt cx="0" cy="0"/>
+        </a:xfrm>
+      </p:grpSpPr>
       <p:sp>
         <p:nvSpPr>
           <p:cNvPr id="2" name="TextBox 1"/>
@@ -3396,7 +3435,7 @@
 </file>
 
 <file path=ppt/slides/slide11.xml><?xml version="1.0" encoding="utf-8"?>
-<p:sld xmlns:a="http://schemas.openxmlformats.org/drawingml/2006/main" xmlns:p="http://schemas.openxmlformats.org/presentationml/2006/main" xmlns:r="http://schemas.openxmlformats.org/officeDocument/2006/relationships">
+<p:sld xmlns:a="http://schemas.openxmlformats.org/drawingml/2006/main" xmlns:r="http://schemas.openxmlformats.org/officeDocument/2006/relationships" xmlns:p="http://schemas.openxmlformats.org/presentationml/2006/main">
   <p:cSld>
     <p:bg>
       <p:bgPr>
@@ -3412,7 +3451,14 @@
         <p:cNvGrpSpPr/>
         <p:nvPr/>
       </p:nvGrpSpPr>
-      <p:grpSpPr/>
+      <p:grpSpPr>
+        <a:xfrm>
+          <a:off x="0" y="0"/>
+          <a:ext cx="0" cy="0"/>
+          <a:chOff x="0" y="0"/>
+          <a:chExt cx="0" cy="0"/>
+        </a:xfrm>
+      </p:grpSpPr>
       <p:sp>
         <p:nvSpPr>
           <p:cNvPr id="2" name="Rectangle 1"/>
@@ -3453,6 +3499,7 @@
           <a:lstStyle/>
           <a:p>
             <a:pPr algn="ctr"/>
+            <a:endParaRPr/>
           </a:p>
         </p:txBody>
       </p:sp>
@@ -3794,6 +3841,7 @@
           <a:lstStyle/>
           <a:p>
             <a:pPr algn="ctr"/>
+            <a:endParaRPr/>
           </a:p>
         </p:txBody>
       </p:sp>
@@ -3841,7 +3889,7 @@
 </file>
 
 <file path=ppt/slides/slide12.xml><?xml version="1.0" encoding="utf-8"?>
-<p:sld xmlns:a="http://schemas.openxmlformats.org/drawingml/2006/main" xmlns:p="http://schemas.openxmlformats.org/presentationml/2006/main" xmlns:r="http://schemas.openxmlformats.org/officeDocument/2006/relationships">
+<p:sld xmlns:a="http://schemas.openxmlformats.org/drawingml/2006/main" xmlns:r="http://schemas.openxmlformats.org/officeDocument/2006/relationships" xmlns:p="http://schemas.openxmlformats.org/presentationml/2006/main">
   <p:cSld>
     <p:bg>
       <p:bgPr>
@@ -3857,7 +3905,14 @@
         <p:cNvGrpSpPr/>
         <p:nvPr/>
       </p:nvGrpSpPr>
-      <p:grpSpPr/>
+      <p:grpSpPr>
+        <a:xfrm>
+          <a:off x="0" y="0"/>
+          <a:ext cx="0" cy="0"/>
+          <a:chOff x="0" y="0"/>
+          <a:chExt cx="0" cy="0"/>
+        </a:xfrm>
+      </p:grpSpPr>
       <p:sp>
         <p:nvSpPr>
           <p:cNvPr id="2" name="TextBox 1"/>
@@ -3903,7 +3958,7 @@
 </file>
 
 <file path=ppt/slides/slide13.xml><?xml version="1.0" encoding="utf-8"?>
-<p:sld xmlns:a="http://schemas.openxmlformats.org/drawingml/2006/main" xmlns:p="http://schemas.openxmlformats.org/presentationml/2006/main" xmlns:r="http://schemas.openxmlformats.org/officeDocument/2006/relationships">
+<p:sld xmlns:a="http://schemas.openxmlformats.org/drawingml/2006/main" xmlns:r="http://schemas.openxmlformats.org/officeDocument/2006/relationships" xmlns:p="http://schemas.openxmlformats.org/presentationml/2006/main">
   <p:cSld>
     <p:bg>
       <p:bgPr>
@@ -3919,7 +3974,14 @@
         <p:cNvGrpSpPr/>
         <p:nvPr/>
       </p:nvGrpSpPr>
-      <p:grpSpPr/>
+      <p:grpSpPr>
+        <a:xfrm>
+          <a:off x="0" y="0"/>
+          <a:ext cx="0" cy="0"/>
+          <a:chOff x="0" y="0"/>
+          <a:chExt cx="0" cy="0"/>
+        </a:xfrm>
+      </p:grpSpPr>
       <p:sp>
         <p:nvSpPr>
           <p:cNvPr id="2" name="Rectangle 1"/>
@@ -3960,6 +4022,7 @@
           <a:lstStyle/>
           <a:p>
             <a:pPr algn="ctr"/>
+            <a:endParaRPr/>
           </a:p>
         </p:txBody>
       </p:sp>
@@ -4007,7 +4070,7 @@
         <p:spPr>
           <a:xfrm>
             <a:off x="457200" y="1143000"/>
-            <a:ext cx="11247120" cy="5120640"/>
+            <a:ext cx="11247120" cy="3908762"/>
           </a:xfrm>
           <a:prstGeom prst="rect">
             <a:avLst/>
@@ -4026,13 +4089,31 @@
               </a:spcBef>
             </a:pPr>
             <a:r>
-              <a:rPr sz="1600">
-                <a:solidFill>
-                  <a:srgbClr val="1A1A2E"/>
-                </a:solidFill>
-                <a:latin typeface="Calibri"/>
-              </a:rPr>
-              <a:t>• 📋  桌面审核（Desktop Review）</a:t>
+              <a:rPr sz="1600" dirty="0">
+                <a:solidFill>
+                  <a:srgbClr val="1A1A2E"/>
+                </a:solidFill>
+                <a:latin typeface="Calibri"/>
+              </a:rPr>
+              <a:t>• 📋  </a:t>
+            </a:r>
+            <a:r>
+              <a:rPr sz="1600" dirty="0" err="1">
+                <a:solidFill>
+                  <a:srgbClr val="1A1A2E"/>
+                </a:solidFill>
+                <a:latin typeface="Calibri"/>
+              </a:rPr>
+              <a:t>桌面审核（Desktop</a:t>
+            </a:r>
+            <a:r>
+              <a:rPr sz="1600" dirty="0">
+                <a:solidFill>
+                  <a:srgbClr val="1A1A2E"/>
+                </a:solidFill>
+                <a:latin typeface="Calibri"/>
+              </a:rPr>
+              <a:t> Review）</a:t>
             </a:r>
           </a:p>
           <a:p>
@@ -4042,14 +4123,29 @@
               </a:spcBef>
             </a:pPr>
             <a:r>
-              <a:rPr sz="1600">
-                <a:solidFill>
-                  <a:srgbClr val="1A1A2E"/>
-                </a:solidFill>
-                <a:latin typeface="Calibri"/>
-              </a:rPr>
-              <a:t>•    我方核查您提交的文件和SAQ回复；无需到访；通常用于低风险供应商</a:t>
-            </a:r>
+              <a:rPr sz="1600" dirty="0">
+                <a:solidFill>
+                  <a:srgbClr val="1A1A2E"/>
+                </a:solidFill>
+                <a:latin typeface="Calibri"/>
+              </a:rPr>
+              <a:t>•    </a:t>
+            </a:r>
+            <a:r>
+              <a:rPr sz="1600" dirty="0" err="1">
+                <a:solidFill>
+                  <a:srgbClr val="1A1A2E"/>
+                </a:solidFill>
+                <a:latin typeface="Calibri"/>
+              </a:rPr>
+              <a:t>我方核查您提交的文件和SAQ回复；无需到访；通常用于低风险供应商</a:t>
+            </a:r>
+            <a:endParaRPr sz="1600" dirty="0">
+              <a:solidFill>
+                <a:srgbClr val="1A1A2E"/>
+              </a:solidFill>
+              <a:latin typeface="Calibri"/>
+            </a:endParaRPr>
           </a:p>
           <a:p>
             <a:pPr>
@@ -4058,7 +4154,7 @@
               </a:spcBef>
             </a:pPr>
             <a:r>
-              <a:rPr sz="1600">
+              <a:rPr sz="1600" dirty="0">
                 <a:solidFill>
                   <a:srgbClr val="1A1A2E"/>
                 </a:solidFill>
@@ -4074,13 +4170,31 @@
               </a:spcBef>
             </a:pPr>
             <a:r>
-              <a:rPr sz="1600">
-                <a:solidFill>
-                  <a:srgbClr val="1A1A2E"/>
-                </a:solidFill>
-                <a:latin typeface="Calibri"/>
-              </a:rPr>
-              <a:t>• 🏭  现场审核（On-site Audit）</a:t>
+              <a:rPr sz="1600" dirty="0">
+                <a:solidFill>
+                  <a:srgbClr val="1A1A2E"/>
+                </a:solidFill>
+                <a:latin typeface="Calibri"/>
+              </a:rPr>
+              <a:t>• 🏭  </a:t>
+            </a:r>
+            <a:r>
+              <a:rPr sz="1600" dirty="0" err="1">
+                <a:solidFill>
+                  <a:srgbClr val="1A1A2E"/>
+                </a:solidFill>
+                <a:latin typeface="Calibri"/>
+              </a:rPr>
+              <a:t>现场审核（On-site</a:t>
+            </a:r>
+            <a:r>
+              <a:rPr sz="1600" dirty="0">
+                <a:solidFill>
+                  <a:srgbClr val="1A1A2E"/>
+                </a:solidFill>
+                <a:latin typeface="Calibri"/>
+              </a:rPr>
+              <a:t> Audit）</a:t>
             </a:r>
           </a:p>
           <a:p>
@@ -4090,7 +4204,7 @@
               </a:spcBef>
             </a:pPr>
             <a:r>
-              <a:rPr sz="1600">
+              <a:rPr sz="1600" dirty="0">
                 <a:solidFill>
                   <a:srgbClr val="1A1A2E"/>
                 </a:solidFill>
@@ -4106,14 +4220,101 @@
               </a:spcBef>
             </a:pPr>
             <a:r>
-              <a:rPr sz="1600">
-                <a:solidFill>
-                  <a:srgbClr val="1A1A2E"/>
-                </a:solidFill>
-                <a:latin typeface="Calibri"/>
-              </a:rPr>
-              <a:t>•    包括：工厂参观 + 文件核查 + 工人访谈 + 开场/末次会议</a:t>
-            </a:r>
+              <a:rPr sz="1600" dirty="0">
+                <a:solidFill>
+                  <a:srgbClr val="1A1A2E"/>
+                </a:solidFill>
+                <a:latin typeface="Calibri"/>
+              </a:rPr>
+              <a:t>•    </a:t>
+            </a:r>
+            <a:r>
+              <a:rPr sz="1600" dirty="0" err="1">
+                <a:solidFill>
+                  <a:srgbClr val="1A1A2E"/>
+                </a:solidFill>
+                <a:latin typeface="Calibri"/>
+              </a:rPr>
+              <a:t>包括：工厂参观</a:t>
+            </a:r>
+            <a:r>
+              <a:rPr sz="1600" dirty="0">
+                <a:solidFill>
+                  <a:srgbClr val="1A1A2E"/>
+                </a:solidFill>
+                <a:latin typeface="Calibri"/>
+              </a:rPr>
+              <a:t> + </a:t>
+            </a:r>
+            <a:r>
+              <a:rPr sz="1600" dirty="0" err="1">
+                <a:solidFill>
+                  <a:srgbClr val="1A1A2E"/>
+                </a:solidFill>
+                <a:latin typeface="Calibri"/>
+              </a:rPr>
+              <a:t>文件核查</a:t>
+            </a:r>
+            <a:r>
+              <a:rPr sz="1600" dirty="0">
+                <a:solidFill>
+                  <a:srgbClr val="1A1A2E"/>
+                </a:solidFill>
+                <a:latin typeface="Calibri"/>
+              </a:rPr>
+              <a:t> + </a:t>
+            </a:r>
+            <a:r>
+              <a:rPr sz="1600" dirty="0" err="1">
+                <a:solidFill>
+                  <a:srgbClr val="1A1A2E"/>
+                </a:solidFill>
+                <a:latin typeface="Calibri"/>
+              </a:rPr>
+              <a:t>工人访谈</a:t>
+            </a:r>
+            <a:r>
+              <a:rPr sz="1600" dirty="0">
+                <a:solidFill>
+                  <a:srgbClr val="1A1A2E"/>
+                </a:solidFill>
+                <a:latin typeface="Calibri"/>
+              </a:rPr>
+              <a:t> + </a:t>
+            </a:r>
+            <a:r>
+              <a:rPr sz="1600" dirty="0" err="1">
+                <a:solidFill>
+                  <a:srgbClr val="1A1A2E"/>
+                </a:solidFill>
+                <a:latin typeface="Calibri"/>
+              </a:rPr>
+              <a:t>开场</a:t>
+            </a:r>
+            <a:r>
+              <a:rPr sz="1600" dirty="0">
+                <a:solidFill>
+                  <a:srgbClr val="1A1A2E"/>
+                </a:solidFill>
+                <a:latin typeface="Calibri"/>
+              </a:rPr>
+              <a:t>/</a:t>
+            </a:r>
+            <a:r>
+              <a:rPr sz="1600" dirty="0" err="1">
+                <a:solidFill>
+                  <a:srgbClr val="1A1A2E"/>
+                </a:solidFill>
+                <a:latin typeface="Calibri"/>
+              </a:rPr>
+              <a:t>末次会议</a:t>
+            </a:r>
+            <a:endParaRPr sz="1600" dirty="0">
+              <a:solidFill>
+                <a:srgbClr val="1A1A2E"/>
+              </a:solidFill>
+              <a:latin typeface="Calibri"/>
+            </a:endParaRPr>
           </a:p>
           <a:p>
             <a:pPr>
@@ -4122,7 +4323,7 @@
               </a:spcBef>
             </a:pPr>
             <a:r>
-              <a:rPr sz="1600">
+              <a:rPr sz="1600" dirty="0">
                 <a:solidFill>
                   <a:srgbClr val="1A1A2E"/>
                 </a:solidFill>
@@ -4138,13 +4339,40 @@
               </a:spcBef>
             </a:pPr>
             <a:r>
-              <a:rPr sz="1600">
-                <a:solidFill>
-                  <a:srgbClr val="1A1A2E"/>
-                </a:solidFill>
-                <a:latin typeface="Calibri"/>
-              </a:rPr>
-              <a:t>• ⚡  不预告审核（Unannounced Audit）</a:t>
+              <a:rPr sz="1600" dirty="0">
+                <a:solidFill>
+                  <a:srgbClr val="1A1A2E"/>
+                </a:solidFill>
+                <a:latin typeface="Calibri"/>
+              </a:rPr>
+              <a:t>• ⚡  </a:t>
+            </a:r>
+            <a:r>
+              <a:rPr lang="zh-CN" altLang="en-US" sz="1600" dirty="0">
+                <a:solidFill>
+                  <a:srgbClr val="1A1A2E"/>
+                </a:solidFill>
+                <a:latin typeface="Calibri"/>
+              </a:rPr>
+              <a:t>突击</a:t>
+            </a:r>
+            <a:r>
+              <a:rPr sz="1600" dirty="0" err="1">
+                <a:solidFill>
+                  <a:srgbClr val="1A1A2E"/>
+                </a:solidFill>
+                <a:latin typeface="Calibri"/>
+              </a:rPr>
+              <a:t>审核（Unannounced</a:t>
+            </a:r>
+            <a:r>
+              <a:rPr sz="1600" dirty="0">
+                <a:solidFill>
+                  <a:srgbClr val="1A1A2E"/>
+                </a:solidFill>
+                <a:latin typeface="Calibri"/>
+              </a:rPr>
+              <a:t> Audit）</a:t>
             </a:r>
           </a:p>
           <a:p>
@@ -4154,14 +4382,29 @@
               </a:spcBef>
             </a:pPr>
             <a:r>
-              <a:rPr sz="1600">
-                <a:solidFill>
-                  <a:srgbClr val="1A1A2E"/>
-                </a:solidFill>
-                <a:latin typeface="Calibri"/>
-              </a:rPr>
-              <a:t>•    不提前通知，直接到厂；用于确认日常运营状态与审核准备时一致</a:t>
-            </a:r>
+              <a:rPr sz="1600" dirty="0">
+                <a:solidFill>
+                  <a:srgbClr val="1A1A2E"/>
+                </a:solidFill>
+                <a:latin typeface="Calibri"/>
+              </a:rPr>
+              <a:t>•    </a:t>
+            </a:r>
+            <a:r>
+              <a:rPr sz="1600" dirty="0" err="1">
+                <a:solidFill>
+                  <a:srgbClr val="1A1A2E"/>
+                </a:solidFill>
+                <a:latin typeface="Calibri"/>
+              </a:rPr>
+              <a:t>不提前通知，直接到厂；用于确认日常运营状态与审核准备时一致</a:t>
+            </a:r>
+            <a:endParaRPr sz="1600" dirty="0">
+              <a:solidFill>
+                <a:srgbClr val="1A1A2E"/>
+              </a:solidFill>
+              <a:latin typeface="Calibri"/>
+            </a:endParaRPr>
           </a:p>
           <a:p>
             <a:pPr>
@@ -4170,14 +4413,29 @@
               </a:spcBef>
             </a:pPr>
             <a:r>
-              <a:rPr sz="1600">
-                <a:solidFill>
-                  <a:srgbClr val="1A1A2E"/>
-                </a:solidFill>
-                <a:latin typeface="Calibri"/>
-              </a:rPr>
-              <a:t>•    提示：如果工厂日常运营合规，不预告审核没什么可担心的</a:t>
-            </a:r>
+              <a:rPr sz="1600" dirty="0">
+                <a:solidFill>
+                  <a:srgbClr val="1A1A2E"/>
+                </a:solidFill>
+                <a:latin typeface="Calibri"/>
+              </a:rPr>
+              <a:t>•    </a:t>
+            </a:r>
+            <a:r>
+              <a:rPr sz="1600" dirty="0" err="1">
+                <a:solidFill>
+                  <a:srgbClr val="1A1A2E"/>
+                </a:solidFill>
+                <a:latin typeface="Calibri"/>
+              </a:rPr>
+              <a:t>提示：如果工厂日常运营合规，不预告审核没什么可担心的</a:t>
+            </a:r>
+            <a:endParaRPr sz="1600" dirty="0">
+              <a:solidFill>
+                <a:srgbClr val="1A1A2E"/>
+              </a:solidFill>
+              <a:latin typeface="Calibri"/>
+            </a:endParaRPr>
           </a:p>
           <a:p>
             <a:pPr>
@@ -4186,7 +4444,7 @@
               </a:spcBef>
             </a:pPr>
             <a:r>
-              <a:rPr sz="1600">
+              <a:rPr sz="1600" dirty="0">
                 <a:solidFill>
                   <a:srgbClr val="1A1A2E"/>
                 </a:solidFill>
@@ -4202,13 +4460,31 @@
               </a:spcBef>
             </a:pPr>
             <a:r>
-              <a:rPr sz="1600">
-                <a:solidFill>
-                  <a:srgbClr val="1A1A2E"/>
-                </a:solidFill>
-                <a:latin typeface="Calibri"/>
-              </a:rPr>
-              <a:t>• 📅  审核频次参考：</a:t>
+              <a:rPr sz="1600" dirty="0">
+                <a:solidFill>
+                  <a:srgbClr val="1A1A2E"/>
+                </a:solidFill>
+                <a:latin typeface="Calibri"/>
+              </a:rPr>
+              <a:t>• 📅  </a:t>
+            </a:r>
+            <a:r>
+              <a:rPr sz="1600" dirty="0" err="1">
+                <a:solidFill>
+                  <a:srgbClr val="1A1A2E"/>
+                </a:solidFill>
+                <a:latin typeface="Calibri"/>
+              </a:rPr>
+              <a:t>审核频次参考</a:t>
+            </a:r>
+            <a:r>
+              <a:rPr sz="1600" dirty="0">
+                <a:solidFill>
+                  <a:srgbClr val="1A1A2E"/>
+                </a:solidFill>
+                <a:latin typeface="Calibri"/>
+              </a:rPr>
+              <a:t>：</a:t>
             </a:r>
           </a:p>
           <a:p>
@@ -4218,13 +4494,31 @@
               </a:spcBef>
             </a:pPr>
             <a:r>
-              <a:rPr sz="1600">
-                <a:solidFill>
-                  <a:srgbClr val="1A1A2E"/>
-                </a:solidFill>
-                <a:latin typeface="Calibri"/>
-              </a:rPr>
-              <a:t>•    低风险供应商：每2年一次 | 中等风险：每年一次 | 高风险：每年2次</a:t>
+              <a:rPr sz="1600" dirty="0">
+                <a:solidFill>
+                  <a:srgbClr val="1A1A2E"/>
+                </a:solidFill>
+                <a:latin typeface="Calibri"/>
+              </a:rPr>
+              <a:t>•    低风险供应商：每2年一次 | </a:t>
+            </a:r>
+            <a:r>
+              <a:rPr sz="1600" dirty="0" err="1">
+                <a:solidFill>
+                  <a:srgbClr val="1A1A2E"/>
+                </a:solidFill>
+                <a:latin typeface="Calibri"/>
+              </a:rPr>
+              <a:t>中等风险：每年一次</a:t>
+            </a:r>
+            <a:r>
+              <a:rPr sz="1600" dirty="0">
+                <a:solidFill>
+                  <a:srgbClr val="1A1A2E"/>
+                </a:solidFill>
+                <a:latin typeface="Calibri"/>
+              </a:rPr>
+              <a:t> | 高风险：每年2次</a:t>
             </a:r>
           </a:p>
         </p:txBody>
@@ -4269,6 +4563,7 @@
           <a:lstStyle/>
           <a:p>
             <a:pPr algn="ctr"/>
+            <a:endParaRPr/>
           </a:p>
         </p:txBody>
       </p:sp>
@@ -4316,7 +4611,7 @@
 </file>
 
 <file path=ppt/slides/slide14.xml><?xml version="1.0" encoding="utf-8"?>
-<p:sld xmlns:a="http://schemas.openxmlformats.org/drawingml/2006/main" xmlns:p="http://schemas.openxmlformats.org/presentationml/2006/main" xmlns:r="http://schemas.openxmlformats.org/officeDocument/2006/relationships">
+<p:sld xmlns:a="http://schemas.openxmlformats.org/drawingml/2006/main" xmlns:r="http://schemas.openxmlformats.org/officeDocument/2006/relationships" xmlns:p="http://schemas.openxmlformats.org/presentationml/2006/main">
   <p:cSld>
     <p:bg>
       <p:bgPr>
@@ -4332,7 +4627,14 @@
         <p:cNvGrpSpPr/>
         <p:nvPr/>
       </p:nvGrpSpPr>
-      <p:grpSpPr/>
+      <p:grpSpPr>
+        <a:xfrm>
+          <a:off x="0" y="0"/>
+          <a:ext cx="0" cy="0"/>
+          <a:chOff x="0" y="0"/>
+          <a:chExt cx="0" cy="0"/>
+        </a:xfrm>
+      </p:grpSpPr>
       <p:sp>
         <p:nvSpPr>
           <p:cNvPr id="2" name="Rectangle 1"/>
@@ -4373,6 +4675,7 @@
           <a:lstStyle/>
           <a:p>
             <a:pPr algn="ctr"/>
+            <a:endParaRPr/>
           </a:p>
         </p:txBody>
       </p:sp>
@@ -4451,6 +4754,7 @@
           <a:lstStyle/>
           <a:p>
             <a:pPr algn="ctr"/>
+            <a:endParaRPr/>
           </a:p>
         </p:txBody>
       </p:sp>
@@ -4529,6 +4833,7 @@
           <a:lstStyle/>
           <a:p>
             <a:pPr algn="ctr"/>
+            <a:endParaRPr/>
           </a:p>
         </p:txBody>
       </p:sp>
@@ -4607,6 +4912,7 @@
           <a:lstStyle/>
           <a:p>
             <a:pPr algn="ctr"/>
+            <a:endParaRPr/>
           </a:p>
         </p:txBody>
       </p:sp>
@@ -4685,6 +4991,7 @@
           <a:lstStyle/>
           <a:p>
             <a:pPr algn="ctr"/>
+            <a:endParaRPr/>
           </a:p>
         </p:txBody>
       </p:sp>
@@ -4763,6 +5070,7 @@
           <a:lstStyle/>
           <a:p>
             <a:pPr algn="ctr"/>
+            <a:endParaRPr/>
           </a:p>
         </p:txBody>
       </p:sp>
@@ -4841,6 +5149,7 @@
           <a:lstStyle/>
           <a:p>
             <a:pPr algn="ctr"/>
+            <a:endParaRPr/>
           </a:p>
         </p:txBody>
       </p:sp>
@@ -4919,6 +5228,7 @@
           <a:lstStyle/>
           <a:p>
             <a:pPr algn="ctr"/>
+            <a:endParaRPr/>
           </a:p>
         </p:txBody>
       </p:sp>
@@ -4997,6 +5307,7 @@
           <a:lstStyle/>
           <a:p>
             <a:pPr algn="ctr"/>
+            <a:endParaRPr/>
           </a:p>
         </p:txBody>
       </p:sp>
@@ -5075,6 +5386,7 @@
           <a:lstStyle/>
           <a:p>
             <a:pPr algn="ctr"/>
+            <a:endParaRPr/>
           </a:p>
         </p:txBody>
       </p:sp>
@@ -5153,6 +5465,7 @@
           <a:lstStyle/>
           <a:p>
             <a:pPr algn="ctr"/>
+            <a:endParaRPr/>
           </a:p>
         </p:txBody>
       </p:sp>
@@ -5231,6 +5544,7 @@
           <a:lstStyle/>
           <a:p>
             <a:pPr algn="ctr"/>
+            <a:endParaRPr/>
           </a:p>
         </p:txBody>
       </p:sp>
@@ -5309,6 +5623,7 @@
           <a:lstStyle/>
           <a:p>
             <a:pPr algn="ctr"/>
+            <a:endParaRPr/>
           </a:p>
         </p:txBody>
       </p:sp>
@@ -5387,6 +5702,7 @@
           <a:lstStyle/>
           <a:p>
             <a:pPr algn="ctr"/>
+            <a:endParaRPr/>
           </a:p>
         </p:txBody>
       </p:sp>
@@ -5465,6 +5781,7 @@
           <a:lstStyle/>
           <a:p>
             <a:pPr algn="ctr"/>
+            <a:endParaRPr/>
           </a:p>
         </p:txBody>
       </p:sp>
@@ -5543,6 +5860,7 @@
           <a:lstStyle/>
           <a:p>
             <a:pPr algn="ctr"/>
+            <a:endParaRPr/>
           </a:p>
         </p:txBody>
       </p:sp>
@@ -5621,6 +5939,7 @@
           <a:lstStyle/>
           <a:p>
             <a:pPr algn="ctr"/>
+            <a:endParaRPr/>
           </a:p>
         </p:txBody>
       </p:sp>
@@ -5699,6 +6018,7 @@
           <a:lstStyle/>
           <a:p>
             <a:pPr algn="ctr"/>
+            <a:endParaRPr/>
           </a:p>
         </p:txBody>
       </p:sp>
@@ -5777,6 +6097,7 @@
           <a:lstStyle/>
           <a:p>
             <a:pPr algn="ctr"/>
+            <a:endParaRPr/>
           </a:p>
         </p:txBody>
       </p:sp>
@@ -5855,6 +6176,7 @@
           <a:lstStyle/>
           <a:p>
             <a:pPr algn="ctr"/>
+            <a:endParaRPr/>
           </a:p>
         </p:txBody>
       </p:sp>
@@ -5933,6 +6255,7 @@
           <a:lstStyle/>
           <a:p>
             <a:pPr algn="ctr"/>
+            <a:endParaRPr/>
           </a:p>
         </p:txBody>
       </p:sp>
@@ -6011,6 +6334,7 @@
           <a:lstStyle/>
           <a:p>
             <a:pPr algn="ctr"/>
+            <a:endParaRPr/>
           </a:p>
         </p:txBody>
       </p:sp>
@@ -6037,15 +6361,7 @@
           <a:lstStyle/>
           <a:p>
             <a:pPr algn="l"/>
-            <a:r>
-              <a:rPr sz="1200" b="0">
-                <a:solidFill>
-                  <a:srgbClr val="1A1A2E"/>
-                </a:solidFill>
-                <a:latin typeface="Calibri"/>
-              </a:rPr>
-              <a:t/>
-            </a:r>
+            <a:endParaRPr/>
           </a:p>
         </p:txBody>
       </p:sp>
@@ -6089,6 +6405,7 @@
           <a:lstStyle/>
           <a:p>
             <a:pPr algn="ctr"/>
+            <a:endParaRPr/>
           </a:p>
         </p:txBody>
       </p:sp>
@@ -6136,7 +6453,7 @@
 </file>
 
 <file path=ppt/slides/slide15.xml><?xml version="1.0" encoding="utf-8"?>
-<p:sld xmlns:a="http://schemas.openxmlformats.org/drawingml/2006/main" xmlns:p="http://schemas.openxmlformats.org/presentationml/2006/main" xmlns:r="http://schemas.openxmlformats.org/officeDocument/2006/relationships">
+<p:sld xmlns:a="http://schemas.openxmlformats.org/drawingml/2006/main" xmlns:r="http://schemas.openxmlformats.org/officeDocument/2006/relationships" xmlns:p="http://schemas.openxmlformats.org/presentationml/2006/main">
   <p:cSld>
     <p:bg>
       <p:bgPr>
@@ -6152,7 +6469,14 @@
         <p:cNvGrpSpPr/>
         <p:nvPr/>
       </p:nvGrpSpPr>
-      <p:grpSpPr/>
+      <p:grpSpPr>
+        <a:xfrm>
+          <a:off x="0" y="0"/>
+          <a:ext cx="0" cy="0"/>
+          <a:chOff x="0" y="0"/>
+          <a:chExt cx="0" cy="0"/>
+        </a:xfrm>
+      </p:grpSpPr>
       <p:sp>
         <p:nvSpPr>
           <p:cNvPr id="2" name="TextBox 1"/>
@@ -6198,7 +6522,7 @@
 </file>
 
 <file path=ppt/slides/slide16.xml><?xml version="1.0" encoding="utf-8"?>
-<p:sld xmlns:a="http://schemas.openxmlformats.org/drawingml/2006/main" xmlns:p="http://schemas.openxmlformats.org/presentationml/2006/main" xmlns:r="http://schemas.openxmlformats.org/officeDocument/2006/relationships">
+<p:sld xmlns:a="http://schemas.openxmlformats.org/drawingml/2006/main" xmlns:r="http://schemas.openxmlformats.org/officeDocument/2006/relationships" xmlns:p="http://schemas.openxmlformats.org/presentationml/2006/main">
   <p:cSld>
     <p:bg>
       <p:bgPr>
@@ -6214,7 +6538,14 @@
         <p:cNvGrpSpPr/>
         <p:nvPr/>
       </p:nvGrpSpPr>
-      <p:grpSpPr/>
+      <p:grpSpPr>
+        <a:xfrm>
+          <a:off x="0" y="0"/>
+          <a:ext cx="0" cy="0"/>
+          <a:chOff x="0" y="0"/>
+          <a:chExt cx="0" cy="0"/>
+        </a:xfrm>
+      </p:grpSpPr>
       <p:sp>
         <p:nvSpPr>
           <p:cNvPr id="2" name="Rectangle 1"/>
@@ -6255,6 +6586,7 @@
           <a:lstStyle/>
           <a:p>
             <a:pPr algn="ctr"/>
+            <a:endParaRPr/>
           </a:p>
         </p:txBody>
       </p:sp>
@@ -6580,6 +6912,7 @@
           <a:lstStyle/>
           <a:p>
             <a:pPr algn="ctr"/>
+            <a:endParaRPr/>
           </a:p>
         </p:txBody>
       </p:sp>
@@ -6627,7 +6960,7 @@
 </file>
 
 <file path=ppt/slides/slide17.xml><?xml version="1.0" encoding="utf-8"?>
-<p:sld xmlns:a="http://schemas.openxmlformats.org/drawingml/2006/main" xmlns:p="http://schemas.openxmlformats.org/presentationml/2006/main" xmlns:r="http://schemas.openxmlformats.org/officeDocument/2006/relationships">
+<p:sld xmlns:a="http://schemas.openxmlformats.org/drawingml/2006/main" xmlns:r="http://schemas.openxmlformats.org/officeDocument/2006/relationships" xmlns:p="http://schemas.openxmlformats.org/presentationml/2006/main">
   <p:cSld>
     <p:bg>
       <p:bgPr>
@@ -6643,7 +6976,14 @@
         <p:cNvGrpSpPr/>
         <p:nvPr/>
       </p:nvGrpSpPr>
-      <p:grpSpPr/>
+      <p:grpSpPr>
+        <a:xfrm>
+          <a:off x="0" y="0"/>
+          <a:ext cx="0" cy="0"/>
+          <a:chOff x="0" y="0"/>
+          <a:chExt cx="0" cy="0"/>
+        </a:xfrm>
+      </p:grpSpPr>
       <p:sp>
         <p:nvSpPr>
           <p:cNvPr id="2" name="TextBox 1"/>
@@ -6689,7 +7029,7 @@
 </file>
 
 <file path=ppt/slides/slide18.xml><?xml version="1.0" encoding="utf-8"?>
-<p:sld xmlns:a="http://schemas.openxmlformats.org/drawingml/2006/main" xmlns:p="http://schemas.openxmlformats.org/presentationml/2006/main" xmlns:r="http://schemas.openxmlformats.org/officeDocument/2006/relationships">
+<p:sld xmlns:a="http://schemas.openxmlformats.org/drawingml/2006/main" xmlns:r="http://schemas.openxmlformats.org/officeDocument/2006/relationships" xmlns:p="http://schemas.openxmlformats.org/presentationml/2006/main">
   <p:cSld>
     <p:bg>
       <p:bgPr>
@@ -6705,7 +7045,14 @@
         <p:cNvGrpSpPr/>
         <p:nvPr/>
       </p:nvGrpSpPr>
-      <p:grpSpPr/>
+      <p:grpSpPr>
+        <a:xfrm>
+          <a:off x="0" y="0"/>
+          <a:ext cx="0" cy="0"/>
+          <a:chOff x="0" y="0"/>
+          <a:chExt cx="0" cy="0"/>
+        </a:xfrm>
+      </p:grpSpPr>
       <p:sp>
         <p:nvSpPr>
           <p:cNvPr id="2" name="Rectangle 1"/>
@@ -6746,6 +7093,7 @@
           <a:lstStyle/>
           <a:p>
             <a:pPr algn="ctr"/>
+            <a:endParaRPr/>
           </a:p>
         </p:txBody>
       </p:sp>
@@ -6824,6 +7172,7 @@
           <a:lstStyle/>
           <a:p>
             <a:pPr algn="ctr"/>
+            <a:endParaRPr/>
           </a:p>
         </p:txBody>
       </p:sp>
@@ -7005,6 +7354,7 @@
           <a:lstStyle/>
           <a:p>
             <a:pPr algn="ctr"/>
+            <a:endParaRPr/>
           </a:p>
         </p:txBody>
       </p:sp>
@@ -7186,6 +7536,7 @@
           <a:lstStyle/>
           <a:p>
             <a:pPr algn="ctr"/>
+            <a:endParaRPr/>
           </a:p>
         </p:txBody>
       </p:sp>
@@ -7233,7 +7584,7 @@
 </file>
 
 <file path=ppt/slides/slide19.xml><?xml version="1.0" encoding="utf-8"?>
-<p:sld xmlns:a="http://schemas.openxmlformats.org/drawingml/2006/main" xmlns:p="http://schemas.openxmlformats.org/presentationml/2006/main" xmlns:r="http://schemas.openxmlformats.org/officeDocument/2006/relationships">
+<p:sld xmlns:a="http://schemas.openxmlformats.org/drawingml/2006/main" xmlns:r="http://schemas.openxmlformats.org/officeDocument/2006/relationships" xmlns:p="http://schemas.openxmlformats.org/presentationml/2006/main">
   <p:cSld>
     <p:spTree>
       <p:nvGrpSpPr>
@@ -7241,7 +7592,14 @@
         <p:cNvGrpSpPr/>
         <p:nvPr/>
       </p:nvGrpSpPr>
-      <p:grpSpPr/>
+      <p:grpSpPr>
+        <a:xfrm>
+          <a:off x="0" y="0"/>
+          <a:ext cx="0" cy="0"/>
+          <a:chOff x="0" y="0"/>
+          <a:chExt cx="0" cy="0"/>
+        </a:xfrm>
+      </p:grpSpPr>
       <p:sp>
         <p:nvSpPr>
           <p:cNvPr id="2" name="Rectangle 1"/>
@@ -7282,6 +7640,7 @@
           <a:lstStyle/>
           <a:p>
             <a:pPr algn="ctr"/>
+            <a:endParaRPr/>
           </a:p>
         </p:txBody>
       </p:sp>
@@ -7360,6 +7719,7 @@
           <a:lstStyle/>
           <a:p>
             <a:pPr algn="ctr"/>
+            <a:endParaRPr/>
           </a:p>
         </p:txBody>
       </p:sp>
@@ -7403,6 +7763,7 @@
           <a:lstStyle/>
           <a:p>
             <a:pPr algn="ctr"/>
+            <a:endParaRPr/>
           </a:p>
         </p:txBody>
       </p:sp>
@@ -7481,6 +7842,7 @@
           <a:lstStyle/>
           <a:p>
             <a:pPr algn="ctr"/>
+            <a:endParaRPr/>
           </a:p>
         </p:txBody>
       </p:sp>
@@ -7559,6 +7921,7 @@
           <a:lstStyle/>
           <a:p>
             <a:pPr algn="ctr"/>
+            <a:endParaRPr/>
           </a:p>
         </p:txBody>
       </p:sp>
@@ -7641,7 +8004,7 @@
 </file>
 
 <file path=ppt/slides/slide2.xml><?xml version="1.0" encoding="utf-8"?>
-<p:sld xmlns:a="http://schemas.openxmlformats.org/drawingml/2006/main" xmlns:p="http://schemas.openxmlformats.org/presentationml/2006/main" xmlns:r="http://schemas.openxmlformats.org/officeDocument/2006/relationships">
+<p:sld xmlns:a="http://schemas.openxmlformats.org/drawingml/2006/main" xmlns:r="http://schemas.openxmlformats.org/officeDocument/2006/relationships" xmlns:p="http://schemas.openxmlformats.org/presentationml/2006/main">
   <p:cSld>
     <p:bg>
       <p:bgPr>
@@ -7657,7 +8020,14 @@
         <p:cNvGrpSpPr/>
         <p:nvPr/>
       </p:nvGrpSpPr>
-      <p:grpSpPr/>
+      <p:grpSpPr>
+        <a:xfrm>
+          <a:off x="0" y="0"/>
+          <a:ext cx="0" cy="0"/>
+          <a:chOff x="0" y="0"/>
+          <a:chExt cx="0" cy="0"/>
+        </a:xfrm>
+      </p:grpSpPr>
       <p:sp>
         <p:nvSpPr>
           <p:cNvPr id="2" name="Rectangle 1"/>
@@ -7698,6 +8068,7 @@
           <a:lstStyle/>
           <a:p>
             <a:pPr algn="ctr"/>
+            <a:endParaRPr/>
           </a:p>
         </p:txBody>
       </p:sp>
@@ -7959,6 +8330,7 @@
           <a:lstStyle/>
           <a:p>
             <a:pPr algn="ctr"/>
+            <a:endParaRPr/>
           </a:p>
         </p:txBody>
       </p:sp>
@@ -8006,7 +8378,7 @@
 </file>
 
 <file path=ppt/slides/slide3.xml><?xml version="1.0" encoding="utf-8"?>
-<p:sld xmlns:a="http://schemas.openxmlformats.org/drawingml/2006/main" xmlns:p="http://schemas.openxmlformats.org/presentationml/2006/main" xmlns:r="http://schemas.openxmlformats.org/officeDocument/2006/relationships">
+<p:sld xmlns:a="http://schemas.openxmlformats.org/drawingml/2006/main" xmlns:r="http://schemas.openxmlformats.org/officeDocument/2006/relationships" xmlns:p="http://schemas.openxmlformats.org/presentationml/2006/main">
   <p:cSld>
     <p:bg>
       <p:bgPr>
@@ -8022,7 +8394,14 @@
         <p:cNvGrpSpPr/>
         <p:nvPr/>
       </p:nvGrpSpPr>
-      <p:grpSpPr/>
+      <p:grpSpPr>
+        <a:xfrm>
+          <a:off x="0" y="0"/>
+          <a:ext cx="0" cy="0"/>
+          <a:chOff x="0" y="0"/>
+          <a:chExt cx="0" cy="0"/>
+        </a:xfrm>
+      </p:grpSpPr>
       <p:sp>
         <p:nvSpPr>
           <p:cNvPr id="2" name="TextBox 1"/>
@@ -8068,7 +8447,7 @@
 </file>
 
 <file path=ppt/slides/slide4.xml><?xml version="1.0" encoding="utf-8"?>
-<p:sld xmlns:a="http://schemas.openxmlformats.org/drawingml/2006/main" xmlns:p="http://schemas.openxmlformats.org/presentationml/2006/main" xmlns:r="http://schemas.openxmlformats.org/officeDocument/2006/relationships">
+<p:sld xmlns:a="http://schemas.openxmlformats.org/drawingml/2006/main" xmlns:r="http://schemas.openxmlformats.org/officeDocument/2006/relationships" xmlns:p="http://schemas.openxmlformats.org/presentationml/2006/main">
   <p:cSld>
     <p:bg>
       <p:bgPr>
@@ -8084,7 +8463,14 @@
         <p:cNvGrpSpPr/>
         <p:nvPr/>
       </p:nvGrpSpPr>
-      <p:grpSpPr/>
+      <p:grpSpPr>
+        <a:xfrm>
+          <a:off x="0" y="0"/>
+          <a:ext cx="0" cy="0"/>
+          <a:chOff x="0" y="0"/>
+          <a:chExt cx="0" cy="0"/>
+        </a:xfrm>
+      </p:grpSpPr>
       <p:sp>
         <p:nvSpPr>
           <p:cNvPr id="2" name="Rectangle 1"/>
@@ -8125,6 +8511,7 @@
           <a:lstStyle/>
           <a:p>
             <a:pPr algn="ctr"/>
+            <a:endParaRPr/>
           </a:p>
         </p:txBody>
       </p:sp>
@@ -8203,6 +8590,7 @@
           <a:lstStyle/>
           <a:p>
             <a:pPr algn="ctr"/>
+            <a:endParaRPr/>
           </a:p>
         </p:txBody>
       </p:sp>
@@ -8368,6 +8756,7 @@
           <a:lstStyle/>
           <a:p>
             <a:pPr algn="ctr"/>
+            <a:endParaRPr/>
           </a:p>
         </p:txBody>
       </p:sp>
@@ -8415,7 +8804,7 @@
 </file>
 
 <file path=ppt/slides/slide5.xml><?xml version="1.0" encoding="utf-8"?>
-<p:sld xmlns:a="http://schemas.openxmlformats.org/drawingml/2006/main" xmlns:p="http://schemas.openxmlformats.org/presentationml/2006/main" xmlns:r="http://schemas.openxmlformats.org/officeDocument/2006/relationships">
+<p:sld xmlns:a="http://schemas.openxmlformats.org/drawingml/2006/main" xmlns:r="http://schemas.openxmlformats.org/officeDocument/2006/relationships" xmlns:p="http://schemas.openxmlformats.org/presentationml/2006/main">
   <p:cSld>
     <p:bg>
       <p:bgPr>
@@ -8431,7 +8820,14 @@
         <p:cNvGrpSpPr/>
         <p:nvPr/>
       </p:nvGrpSpPr>
-      <p:grpSpPr/>
+      <p:grpSpPr>
+        <a:xfrm>
+          <a:off x="0" y="0"/>
+          <a:ext cx="0" cy="0"/>
+          <a:chOff x="0" y="0"/>
+          <a:chExt cx="0" cy="0"/>
+        </a:xfrm>
+      </p:grpSpPr>
       <p:sp>
         <p:nvSpPr>
           <p:cNvPr id="2" name="TextBox 1"/>
@@ -8477,7 +8873,7 @@
 </file>
 
 <file path=ppt/slides/slide6.xml><?xml version="1.0" encoding="utf-8"?>
-<p:sld xmlns:a="http://schemas.openxmlformats.org/drawingml/2006/main" xmlns:p="http://schemas.openxmlformats.org/presentationml/2006/main" xmlns:r="http://schemas.openxmlformats.org/officeDocument/2006/relationships">
+<p:sld xmlns:a="http://schemas.openxmlformats.org/drawingml/2006/main" xmlns:r="http://schemas.openxmlformats.org/officeDocument/2006/relationships" xmlns:p="http://schemas.openxmlformats.org/presentationml/2006/main">
   <p:cSld>
     <p:bg>
       <p:bgPr>
@@ -8493,7 +8889,14 @@
         <p:cNvGrpSpPr/>
         <p:nvPr/>
       </p:nvGrpSpPr>
-      <p:grpSpPr/>
+      <p:grpSpPr>
+        <a:xfrm>
+          <a:off x="0" y="0"/>
+          <a:ext cx="0" cy="0"/>
+          <a:chOff x="0" y="0"/>
+          <a:chExt cx="0" cy="0"/>
+        </a:xfrm>
+      </p:grpSpPr>
       <p:sp>
         <p:nvSpPr>
           <p:cNvPr id="2" name="Rectangle 1"/>
@@ -8534,6 +8937,7 @@
           <a:lstStyle/>
           <a:p>
             <a:pPr algn="ctr"/>
+            <a:endParaRPr/>
           </a:p>
         </p:txBody>
       </p:sp>
@@ -8612,6 +9016,7 @@
           <a:lstStyle/>
           <a:p>
             <a:pPr algn="ctr"/>
+            <a:endParaRPr/>
           </a:p>
         </p:txBody>
       </p:sp>
@@ -8690,6 +9095,7 @@
           <a:lstStyle/>
           <a:p>
             <a:pPr algn="ctr"/>
+            <a:endParaRPr/>
           </a:p>
         </p:txBody>
       </p:sp>
@@ -8768,6 +9174,7 @@
           <a:lstStyle/>
           <a:p>
             <a:pPr algn="ctr"/>
+            <a:endParaRPr/>
           </a:p>
         </p:txBody>
       </p:sp>
@@ -8846,6 +9253,7 @@
           <a:lstStyle/>
           <a:p>
             <a:pPr algn="ctr"/>
+            <a:endParaRPr/>
           </a:p>
         </p:txBody>
       </p:sp>
@@ -8924,6 +9332,7 @@
           <a:lstStyle/>
           <a:p>
             <a:pPr algn="ctr"/>
+            <a:endParaRPr/>
           </a:p>
         </p:txBody>
       </p:sp>
@@ -9004,6 +9413,7 @@
           <a:lstStyle/>
           <a:p>
             <a:pPr algn="ctr"/>
+            <a:endParaRPr/>
           </a:p>
         </p:txBody>
       </p:sp>
@@ -9084,6 +9494,7 @@
           <a:lstStyle/>
           <a:p>
             <a:pPr algn="ctr"/>
+            <a:endParaRPr/>
           </a:p>
         </p:txBody>
       </p:sp>
@@ -9162,6 +9573,7 @@
           <a:lstStyle/>
           <a:p>
             <a:pPr algn="ctr"/>
+            <a:endParaRPr/>
           </a:p>
         </p:txBody>
       </p:sp>
@@ -9242,6 +9654,7 @@
           <a:lstStyle/>
           <a:p>
             <a:pPr algn="ctr"/>
+            <a:endParaRPr/>
           </a:p>
         </p:txBody>
       </p:sp>
@@ -9322,6 +9735,7 @@
           <a:lstStyle/>
           <a:p>
             <a:pPr algn="ctr"/>
+            <a:endParaRPr/>
           </a:p>
         </p:txBody>
       </p:sp>
@@ -9400,6 +9814,7 @@
           <a:lstStyle/>
           <a:p>
             <a:pPr algn="ctr"/>
+            <a:endParaRPr/>
           </a:p>
         </p:txBody>
       </p:sp>
@@ -9480,6 +9895,7 @@
           <a:lstStyle/>
           <a:p>
             <a:pPr algn="ctr"/>
+            <a:endParaRPr/>
           </a:p>
         </p:txBody>
       </p:sp>
@@ -9560,6 +9976,7 @@
           <a:lstStyle/>
           <a:p>
             <a:pPr algn="ctr"/>
+            <a:endParaRPr/>
           </a:p>
         </p:txBody>
       </p:sp>
@@ -9638,6 +10055,7 @@
           <a:lstStyle/>
           <a:p>
             <a:pPr algn="ctr"/>
+            <a:endParaRPr/>
           </a:p>
         </p:txBody>
       </p:sp>
@@ -9718,6 +10136,7 @@
           <a:lstStyle/>
           <a:p>
             <a:pPr algn="ctr"/>
+            <a:endParaRPr/>
           </a:p>
         </p:txBody>
       </p:sp>
@@ -9798,6 +10217,7 @@
           <a:lstStyle/>
           <a:p>
             <a:pPr algn="ctr"/>
+            <a:endParaRPr/>
           </a:p>
         </p:txBody>
       </p:sp>
@@ -9876,6 +10296,7 @@
           <a:lstStyle/>
           <a:p>
             <a:pPr algn="ctr"/>
+            <a:endParaRPr/>
           </a:p>
         </p:txBody>
       </p:sp>
@@ -9956,6 +10377,7 @@
           <a:lstStyle/>
           <a:p>
             <a:pPr algn="ctr"/>
+            <a:endParaRPr/>
           </a:p>
         </p:txBody>
       </p:sp>
@@ -10035,6 +10457,7 @@
           <a:lstStyle/>
           <a:p>
             <a:pPr algn="ctr"/>
+            <a:endParaRPr/>
           </a:p>
         </p:txBody>
       </p:sp>
@@ -10113,6 +10536,7 @@
           <a:lstStyle/>
           <a:p>
             <a:pPr algn="ctr"/>
+            <a:endParaRPr/>
           </a:p>
         </p:txBody>
       </p:sp>
@@ -10193,6 +10617,7 @@
           <a:lstStyle/>
           <a:p>
             <a:pPr algn="ctr"/>
+            <a:endParaRPr/>
           </a:p>
         </p:txBody>
       </p:sp>
@@ -10272,6 +10697,7 @@
           <a:lstStyle/>
           <a:p>
             <a:pPr algn="ctr"/>
+            <a:endParaRPr/>
           </a:p>
         </p:txBody>
       </p:sp>
@@ -10319,7 +10745,7 @@
 </file>
 
 <file path=ppt/slides/slide7.xml><?xml version="1.0" encoding="utf-8"?>
-<p:sld xmlns:a="http://schemas.openxmlformats.org/drawingml/2006/main" xmlns:p="http://schemas.openxmlformats.org/presentationml/2006/main" xmlns:r="http://schemas.openxmlformats.org/officeDocument/2006/relationships">
+<p:sld xmlns:a="http://schemas.openxmlformats.org/drawingml/2006/main" xmlns:r="http://schemas.openxmlformats.org/officeDocument/2006/relationships" xmlns:p="http://schemas.openxmlformats.org/presentationml/2006/main">
   <p:cSld>
     <p:bg>
       <p:bgPr>
@@ -10335,7 +10761,14 @@
         <p:cNvGrpSpPr/>
         <p:nvPr/>
       </p:nvGrpSpPr>
-      <p:grpSpPr/>
+      <p:grpSpPr>
+        <a:xfrm>
+          <a:off x="0" y="0"/>
+          <a:ext cx="0" cy="0"/>
+          <a:chOff x="0" y="0"/>
+          <a:chExt cx="0" cy="0"/>
+        </a:xfrm>
+      </p:grpSpPr>
       <p:sp>
         <p:nvSpPr>
           <p:cNvPr id="2" name="TextBox 1"/>
@@ -10381,7 +10814,7 @@
 </file>
 
 <file path=ppt/slides/slide8.xml><?xml version="1.0" encoding="utf-8"?>
-<p:sld xmlns:a="http://schemas.openxmlformats.org/drawingml/2006/main" xmlns:p="http://schemas.openxmlformats.org/presentationml/2006/main" xmlns:r="http://schemas.openxmlformats.org/officeDocument/2006/relationships">
+<p:sld xmlns:a="http://schemas.openxmlformats.org/drawingml/2006/main" xmlns:r="http://schemas.openxmlformats.org/officeDocument/2006/relationships" xmlns:p="http://schemas.openxmlformats.org/presentationml/2006/main">
   <p:cSld>
     <p:bg>
       <p:bgPr>
@@ -10397,7 +10830,14 @@
         <p:cNvGrpSpPr/>
         <p:nvPr/>
       </p:nvGrpSpPr>
-      <p:grpSpPr/>
+      <p:grpSpPr>
+        <a:xfrm>
+          <a:off x="0" y="0"/>
+          <a:ext cx="0" cy="0"/>
+          <a:chOff x="0" y="0"/>
+          <a:chExt cx="0" cy="0"/>
+        </a:xfrm>
+      </p:grpSpPr>
       <p:sp>
         <p:nvSpPr>
           <p:cNvPr id="2" name="Rectangle 1"/>
@@ -10438,6 +10878,7 @@
           <a:lstStyle/>
           <a:p>
             <a:pPr algn="ctr"/>
+            <a:endParaRPr/>
           </a:p>
         </p:txBody>
       </p:sp>
@@ -10747,6 +11188,7 @@
           <a:lstStyle/>
           <a:p>
             <a:pPr algn="ctr"/>
+            <a:endParaRPr/>
           </a:p>
         </p:txBody>
       </p:sp>
@@ -10794,7 +11236,7 @@
 </file>
 
 <file path=ppt/slides/slide9.xml><?xml version="1.0" encoding="utf-8"?>
-<p:sld xmlns:a="http://schemas.openxmlformats.org/drawingml/2006/main" xmlns:p="http://schemas.openxmlformats.org/presentationml/2006/main" xmlns:r="http://schemas.openxmlformats.org/officeDocument/2006/relationships">
+<p:sld xmlns:a="http://schemas.openxmlformats.org/drawingml/2006/main" xmlns:r="http://schemas.openxmlformats.org/officeDocument/2006/relationships" xmlns:p="http://schemas.openxmlformats.org/presentationml/2006/main">
   <p:cSld>
     <p:bg>
       <p:bgPr>
@@ -10810,7 +11252,14 @@
         <p:cNvGrpSpPr/>
         <p:nvPr/>
       </p:nvGrpSpPr>
-      <p:grpSpPr/>
+      <p:grpSpPr>
+        <a:xfrm>
+          <a:off x="0" y="0"/>
+          <a:ext cx="0" cy="0"/>
+          <a:chOff x="0" y="0"/>
+          <a:chExt cx="0" cy="0"/>
+        </a:xfrm>
+      </p:grpSpPr>
       <p:sp>
         <p:nvSpPr>
           <p:cNvPr id="2" name="Rectangle 1"/>
@@ -10851,6 +11300,7 @@
           <a:lstStyle/>
           <a:p>
             <a:pPr algn="ctr"/>
+            <a:endParaRPr/>
           </a:p>
         </p:txBody>
       </p:sp>
@@ -10929,6 +11379,7 @@
           <a:lstStyle/>
           <a:p>
             <a:pPr algn="ctr"/>
+            <a:endParaRPr/>
           </a:p>
         </p:txBody>
       </p:sp>
@@ -11110,6 +11561,7 @@
           <a:lstStyle/>
           <a:p>
             <a:pPr algn="ctr"/>
+            <a:endParaRPr/>
           </a:p>
         </p:txBody>
       </p:sp>
@@ -11277,6 +11729,7 @@
           <a:lstStyle/>
           <a:p>
             <a:pPr algn="ctr"/>
+            <a:endParaRPr/>
           </a:p>
         </p:txBody>
       </p:sp>
